--- a/docs/briefs/wootzano.pptx
+++ b/docs/briefs/wootzano.pptx
@@ -513,27 +513,27 @@
           </a:p>
           <a:p>
             <a:r>
-              <a:t>- When you install at a new packhouse or take on a new cultivar, how much footage do you collect and how many frames actually get labelled before the cell is trusted to snip?</a:t>
-            </a:r>
-          </a:p>
-          <a:p>
-            <a:r>
-              <a:t>- Who labels today, the engineering team, an agency or the customer's staff, and in which tool?</a:t>
-            </a:r>
-          </a:p>
-          <a:p>
-            <a:r>
-              <a:t>- How do you currently decide a model is good enough to go live on a line, and is that a number or a week of watching it run?</a:t>
-            </a:r>
-          </a:p>
-          <a:p>
-            <a:r>
-              <a:t>- Where does the camera footage live now, your own S3 or Azure bucket, or on the cell PCs at each site, and are packhouse customers restricted on what leaves their premises?</a:t>
-            </a:r>
-          </a:p>
-          <a:p>
-            <a:r>
-              <a:t>- How do you pair the electronic skin force data with the vision frames, and would you want both reviewed against the same timeline?</a:t>
+              <a:t>- When you commission a new packhouse or a new variety, how many frames do you label before the cell is ready, and who does that labelling?</a:t>
+            </a:r>
+          </a:p>
+          <a:p>
+            <a:r>
+              <a:t>- How do you currently decide which recorded frames are worth annotating, and how much of what you label turns out to be near-duplicate?</a:t>
+            </a:r>
+          </a:p>
+          <a:p>
+            <a:r>
+              <a:t>- What does a snip failure look like in your logs, and how do you trace it back to the training data that caused it?</a:t>
+            </a:r>
+          </a:p>
+          <a:p>
+            <a:r>
+              <a:t>- Do you evaluate stem detection and weight estimation per site and per variety, or only by line throughput after rollout?</a:t>
+            </a:r>
+          </a:p>
+          <a:p>
+            <a:r>
+              <a:t>- Does footage stay on site in each packhouse, or does it come back to your own cloud storage, and what have customers said about data leaving their premises?</a:t>
             </a:r>
           </a:p>
         </p:txBody>
@@ -613,27 +613,22 @@
           </a:p>
           <a:p>
             <a:r>
-              <a:t>- Small hardware-led company in Sedgefield with no advertised CV or ML roles, so the ML team may be two or three people using free tooling and with no budget line for a data platform.</a:t>
-            </a:r>
-          </a:p>
-          <a:p>
-            <a:r>
-              <a:t>- Vision may be a solved-enough internal problem in their view, with hardware, the skin sensor and install throughput taking priority for spend.</a:t>
-            </a:r>
-          </a:p>
-          <a:p>
-            <a:r>
-              <a:t>- Footage may sit on cell PCs at customer packhouses with contractual limits on export, which would slow any bucket registration.</a:t>
-            </a:r>
-          </a:p>
-          <a:p>
-            <a:r>
-              <a:t>- In-house annotation app already built and good enough; switching cost and a CTO's preference for owning the stack.</a:t>
-            </a:r>
-          </a:p>
-          <a:p>
-            <a:r>
-              <a:t>- No recent funding, hiring or product signals in window, so timing and budget are unknown and this could be a long nurture.</a:t>
+              <a:t>- Small, hardware-led team with no CV or ML job ads open, so labelling may be handled informally in-house with CVAT and seen as free.</a:t>
+            </a:r>
+          </a:p>
+          <a:p>
+            <a:r>
+              <a:t>- Robotics capital spend may leave no budget line for data tooling; the buying case has to be framed as commissioning time per new site.</a:t>
+            </a:r>
+          </a:p>
+          <a:p>
+            <a:r>
+              <a:t>- Packhouse customers may forbid footage leaving their site, which limits what can be centralised (Encord's bucket-registration model helps, but needs checking early).</a:t>
+            </a:r>
+          </a:p>
+          <a:p>
+            <a:r>
+              <a:t>- Evidence base is thin: no recent signals, no job ads, and our understanding of their crops, sensors and volumes is largely inference.</a:t>
             </a:r>
           </a:p>
         </p:txBody>
@@ -3800,7 +3795,7 @@
                 </a:solidFill>
                 <a:latin typeface="Calibri"/>
               </a:rPr>
-              <a:t>Prepared 2026-09-21</a:t>
+              <a:t>Prepared 2026-09-28</a:t>
             </a:r>
           </a:p>
           <a:p>
@@ -3910,7 +3905,7 @@
                 </a:solidFill>
                 <a:latin typeface="Calibri"/>
               </a:rPr>
-              <a:t>Wootzano sells a robot that must find the stem, judge the weight and snip cleanly on every truss, so its edge is the vision data behind that snip, and every new customer, cultivar and season means relabelling that data faster than a small team can by hand.</a:t>
+              <a:t>Wootzano's accuracy claim rests on stem detection and clean snips across endless near-identical conveyor frames, so the win is curating which frames to label and proving snip accuracy per crop, not labelling more.</a:t>
             </a:r>
           </a:p>
         </p:txBody>
@@ -4206,7 +4201,7 @@
                 </a:solidFill>
                 <a:latin typeface="Calibri"/>
               </a:rPr>
-              <a:t>Avarai is a collaborative robotic packing cell for post-harvest fresh produce, sized to replace one human on a punnet line. It combines a dexterous hand with patented food-safe electronic skin, vision-based stem detection and intelligent weight estimation to snip vine produce to a retailer's target weight without bruising. Packhouses and growers pay, pitched on labour cost per line and payback, with claimed 30% cost saving and 40-50% productivity uplift.</a:t>
+              <a:t>Wootzano sells Avarai, a collaborative robotic packing cell for post-harvest fresh produce, with a food-safe dexterous hand using patented electronic skin and a vision system that detects stems, estimates weight and snips vine produce to a retailer's target weight. Buyers are packhouses and growers, paid for on a per-line ROI case (up to 50% less human labour, 30% cost saving per line). Robots are installed on site, so models must hold up across customer sites, lighting, crops and seasons.</a:t>
             </a:r>
           </a:p>
         </p:txBody>
@@ -4367,7 +4362,7 @@
                 </a:solidFill>
                 <a:latin typeface="Calibri"/>
               </a:rPr>
-              <a:t>Guess: Intel RealSense or similar RGB-D cameras above the conveyor and on the arm capture continuous close-up video of trusses, punnets and the gripper, plus tactile streams from the electronic skin.</a:t>
+              <a:t>Cameras (guess: Intel RealSense RGB-D, given the stated Intel partnership) capture close-up frames of trusses and punnets on the conveyor at each installed cell.</a:t>
             </a:r>
           </a:p>
         </p:txBody>
@@ -4489,7 +4484,7 @@
                 </a:solidFill>
                 <a:latin typeface="Calibri"/>
               </a:rPr>
-              <a:t>Guess: footage is pulled off the cell PC at each packhouse and pooled centrally, likely in object storage or on a NAS in Sedgefield, with little frame-level metadata beyond site, line and date.</a:t>
+              <a:t>Guess: frames are recorded locally per site, then shipped or synced to central storage; unclear whether all sites stream back or only on-request clips during commissioning.</a:t>
             </a:r>
           </a:p>
         </p:txBody>
@@ -4611,7 +4606,7 @@
                 </a:solidFill>
                 <a:latin typeface="Calibri"/>
               </a:rPr>
-              <a:t>Guess: engineers hand-pick frames for labelling, probably with an open source tool (CVAT or Label Studio) or a small in-house web app, and label stems, snip points and fruit masks.</a:t>
+              <a:t>Engineers select clips by hand around failures (missed stem, bad snip, bruising, dropped fruit) and label stems, fruit and snip points in an open-source or in-house tool (guess: CVAT or similar).</a:t>
             </a:r>
           </a:p>
         </p:txBody>
@@ -4733,7 +4728,7 @@
                 </a:solidFill>
                 <a:latin typeface="Calibri"/>
               </a:rPr>
-              <a:t>Guess: models for stem and snip-point detection plus weight estimation are trained in-house, with grasp and force policy tuned against the skin sensor data separately.</a:t>
+              <a:t>Detection / segmentation and weight-estimation models are retrained centrally, validated on a held-out set, then pushed to cells.</a:t>
             </a:r>
           </a:p>
         </p:txBody>
@@ -4855,7 +4850,7 @@
                 </a:solidFill>
                 <a:latin typeface="Calibri"/>
               </a:rPr>
-              <a:t>Guess: validation is qualitative, watching the cell run on a new cultivar during a pilot week and patching failures by adding more frames from that site.</a:t>
+              <a:t>Guess: field performance is judged by packhouse throughput and reject rates rather than per-class mAP, so model regressions per crop variety are hard to see before rollout.</a:t>
             </a:r>
           </a:p>
         </p:txBody>
@@ -4977,7 +4972,7 @@
                 </a:solidFill>
                 <a:latin typeface="Calibri"/>
               </a:rPr>
-              <a:t>Guess: each new customer, produce type or packaging spec triggers a fresh collection and labelling cycle, which gates how fast installs can scale.</a:t>
+              <a:t>Tactile e-skin data is likely handled in a separate stream from vision, with no shared record of what happened in a given grasp.</a:t>
             </a:r>
           </a:p>
         </p:txBody>
@@ -5361,7 +5356,7 @@
                 </a:solidFill>
                 <a:latin typeface="Calibri"/>
               </a:rPr>
-              <a:t>Every new packhouse, cultivar or punnet spec needs a fresh labelled set before the snip is reliable, so data work, not hardware, sets the pace of installs.</a:t>
+              <a:t>Near-duplicate conveyor frames dominate. Labelling budget goes on the thousandth ordinary truss while rare failure modes (tangled vines, occluded stems, soft or damaged fruit) stay under-represented.</a:t>
             </a:r>
           </a:p>
         </p:txBody>
@@ -5439,7 +5434,7 @@
                 </a:solidFill>
                 <a:latin typeface="Calibri"/>
               </a:rPr>
-              <a:t>Site promises Day 1 install, Day 2 ready to use, and per-line ROI, which only holds if vision generalises across sites and produce types.</a:t>
+              <a:t>A fixed-camera cell running a full packhouse shift produces highly repetitive imagery; the site sells consistency ("a clean, precise snip, each and every time").</a:t>
             </a:r>
           </a:p>
         </p:txBody>
@@ -5517,7 +5512,7 @@
                 </a:solidFill>
                 <a:latin typeface="Calibri"/>
               </a:rPr>
-              <a:t>Annotate with a shared ontology across sites, SAM 3 auto-segmentation and object tracking across native video to label whole truss sequences from a few clicks, then Agents to pre-label new-site footage with their own stem detector so humans only correct.</a:t>
+              <a:t>Index registers frames in their own bucket, computes embeddings and quality metrics, and lets them de-duplicate and diversity-sample into Collections. Our own warehouse-stream test cut frames to label by 61% while keeping 95% of racks, and the curated pick beat a random pick of equal size.</a:t>
             </a:r>
           </a:p>
         </p:txBody>
@@ -5683,7 +5678,7 @@
                 </a:solidFill>
                 <a:latin typeface="Calibri"/>
               </a:rPr>
-              <a:t>Conveyor footage is overwhelmingly near-duplicate, so the team labels thousands of frames that teach the model nothing while rare defects and odd trusses stay under-represented.</a:t>
+              <a:t>Each new site, crop variety or season is a cold start. Labelling a fresh set by hand delays go-live, which conflicts with the "Day 1 install, Day 2 ready" promise.</a:t>
             </a:r>
           </a:p>
         </p:txBody>
@@ -5761,7 +5756,7 @@
                 </a:solidFill>
                 <a:latin typeface="Calibri"/>
               </a:rPr>
-              <a:t>Fixed overhead camera on a repetitive packing line is inherently redundant; no CV job ads found, implying a small team with no curation tooling.</a:t>
+              <a:t>Site promises next-day readiness and adaptability across produce; a deployed-robot business inevitably faces per-packhouse lighting, punnet and variety drift.</a:t>
             </a:r>
           </a:p>
         </p:txBody>
@@ -5839,7 +5834,7 @@
                 </a:solidFill>
                 <a:latin typeface="Calibri"/>
               </a:rPr>
-              <a:t>Index registers their existing bucket, no data movement, computes embeddings and per-frame quality metrics, then similarity search and the embedding plot cut duplicates and build Collections of the rare cases worth labelling.</a:t>
+              <a:t>Agents run their existing detector as a pre-labelling stage in the workflow, so a new site's data arrives part-labelled and humans only correct. Annotate adds SAM 3 auto-segmentation, object tracking and interpolation on native video for fruit and truss masks.</a:t>
             </a:r>
           </a:p>
         </p:txBody>
@@ -6005,7 +6000,7 @@
                 </a:solidFill>
                 <a:latin typeface="Calibri"/>
               </a:rPr>
-              <a:t>No quantified way to say which failure mode is costing throughput, so model fixes are guessed from watching the cell rather than measured per class and condition.</a:t>
+              <a:t>No clear way to prove which data fixes a snip failure. Model changes are judged by packhouse throughput after rollout, which is slow and expensive feedback.</a:t>
             </a:r>
           </a:p>
         </p:txBody>
@@ -6083,7 +6078,7 @@
                 </a:solidFill>
                 <a:latin typeface="Calibri"/>
               </a:rPr>
-              <a:t>Marketing leads on precision snipping and clean stem detection, but nothing on site suggests a measured evaluation loop; no ML hires advertised.</a:t>
+              <a:t>Marketing quantifies line productivity, not model metrics; no ML or CV job ads found, suggesting a small team with no dedicated data or evaluation tooling.</a:t>
             </a:r>
           </a:p>
         </p:txBody>
@@ -6161,7 +6156,7 @@
                 </a:solidFill>
                 <a:latin typeface="Calibri"/>
               </a:rPr>
-              <a:t>Active imports their predictions for mAP, F1, PR curves and confusion matrix, sliced by class, site or any data metric, and metric-to-failure correlation points at which frames to label next.</a:t>
+              <a:t>Active imports their predictions for mAP/mAR/F1, PR curves and confusion matrix, sliced by class, IoU threshold and any data metric (for example blur or occlusion). Metric-to-failure correlation names which frames to label next, and label validation surfaces stem labels that are simply wrong.</a:t>
             </a:r>
           </a:p>
         </p:txBody>
@@ -6527,7 +6522,7 @@
                           </a:solidFill>
                           <a:latin typeface="Calibri"/>
                         </a:rPr>
-                        <a:t>Truss stem / vine</a:t>
+                        <a:t>Vine / truss stem</a:t>
                       </a:r>
                     </a:p>
                   </a:txBody>
@@ -6571,7 +6566,7 @@
                           </a:solidFill>
                           <a:latin typeface="Calibri"/>
                         </a:rPr>
-                        <a:t>Stem is a thin curved structure; a polyline captures path and branch order for snipping.</a:t>
+                        <a:t>Stem geometry drives the snip; a centreline is more useful than a box</a:t>
                       </a:r>
                     </a:p>
                   </a:txBody>
@@ -6639,7 +6634,7 @@
                           </a:solidFill>
                           <a:latin typeface="Calibri"/>
                         </a:rPr>
-                        <a:t>The exact cut location the gripper and cutter must target.</a:t>
+                        <a:t>The exact cut location the controller needs, evaluated as pixel error</a:t>
                       </a:r>
                     </a:p>
                   </a:txBody>
@@ -6663,7 +6658,7 @@
                           </a:solidFill>
                           <a:latin typeface="Calibri"/>
                         </a:rPr>
-                        <a:t>Individual fruit (tomato/berry)</a:t>
+                        <a:t>Individual fruit</a:t>
                       </a:r>
                     </a:p>
                   </a:txBody>
@@ -6707,7 +6702,7 @@
                           </a:solidFill>
                           <a:latin typeface="Calibri"/>
                         </a:rPr>
-                        <a:t>Per-fruit pixel masks feed size and weight estimation on touching, overlapping produce.</a:t>
+                        <a:t>Per-fruit area feeds weight estimation to the retailer's target</a:t>
                       </a:r>
                     </a:p>
                   </a:txBody>
@@ -6731,7 +6726,7 @@
                           </a:solidFill>
                           <a:latin typeface="Calibri"/>
                         </a:rPr>
-                        <a:t>Calyx / stalk attachment</a:t>
+                        <a:t>Grasp point on fruit</a:t>
                       </a:r>
                     </a:p>
                   </a:txBody>
@@ -6775,7 +6770,7 @@
                           </a:solidFill>
                           <a:latin typeface="Calibri"/>
                         </a:rPr>
-                        <a:t>Anchor for orientation and for judging whether a fruit detaches cleanly.</a:t>
+                        <a:t>Links vision to the e-skin force decision for the dexterous hand</a:t>
                       </a:r>
                     </a:p>
                   </a:txBody>
@@ -6799,7 +6794,7 @@
                           </a:solidFill>
                           <a:latin typeface="Calibri"/>
                         </a:rPr>
-                        <a:t>Grasp region on fruit</a:t>
+                        <a:t>Punnet / tray</a:t>
                       </a:r>
                     </a:p>
                   </a:txBody>
@@ -6821,7 +6816,7 @@
                           </a:solidFill>
                           <a:latin typeface="Calibri"/>
                         </a:rPr>
-                        <a:t>polygon</a:t>
+                        <a:t>bounding box</a:t>
                       </a:r>
                     </a:p>
                   </a:txBody>
@@ -6843,7 +6838,7 @@
                           </a:solidFill>
                           <a:latin typeface="Calibri"/>
                         </a:rPr>
-                        <a:t>Links vision to electronic-skin force targets for bruise-free handling.</a:t>
+                        <a:t>Placement and fill checks against retailer packing spec</a:t>
                       </a:r>
                     </a:p>
                   </a:txBody>
@@ -6867,7 +6862,7 @@
                           </a:solidFill>
                           <a:latin typeface="Calibri"/>
                         </a:rPr>
-                        <a:t>Defect (bruise, split, mould, rot)</a:t>
+                        <a:t>Defect or damage (bruise, split, mould)</a:t>
                       </a:r>
                     </a:p>
                   </a:txBody>
@@ -6911,7 +6906,7 @@
                           </a:solidFill>
                           <a:latin typeface="Calibri"/>
                         </a:rPr>
-                        <a:t>Irregular boundaries; drives reject decisions and retailer quality specs.</a:t>
+                        <a:t>Reject decisions and evidence that handling caused no bruising</a:t>
                       </a:r>
                     </a:p>
                   </a:txBody>
@@ -6935,7 +6930,7 @@
                           </a:solidFill>
                           <a:latin typeface="Calibri"/>
                         </a:rPr>
-                        <a:t>Punnet / tray and fill state</a:t>
+                        <a:t>Occlusion / tangled truss</a:t>
                       </a:r>
                     </a:p>
                   </a:txBody>
@@ -6957,7 +6952,7 @@
                           </a:solidFill>
                           <a:latin typeface="Calibri"/>
                         </a:rPr>
-                        <a:t>bounding box</a:t>
+                        <a:t>frame classification</a:t>
                       </a:r>
                     </a:p>
                   </a:txBody>
@@ -6979,7 +6974,7 @@
                           </a:solidFill>
                           <a:latin typeface="Calibri"/>
                         </a:rPr>
-                        <a:t>Tracks target container and packed weight progress on the line.</a:t>
+                        <a:t>Flags the hard frames worth over-sampling in training</a:t>
                       </a:r>
                     </a:p>
                   </a:txBody>
@@ -7003,7 +6998,7 @@
                           </a:solidFill>
                           <a:latin typeface="Calibri"/>
                         </a:rPr>
-                        <a:t>Frame condition (cultivar, site, lighting, occlusion, wet)</a:t>
+                        <a:t>Crop variety and site conditions</a:t>
                       </a:r>
                     </a:p>
                   </a:txBody>
@@ -7047,7 +7042,7 @@
                           </a:solidFill>
                           <a:latin typeface="Calibri"/>
                         </a:rPr>
-                        <a:t>Lets them slice model performance by packhouse and produce type in Active.</a:t>
+                        <a:t>Lets them slice model performance per packhouse, variety and shift</a:t>
                       </a:r>
                     </a:p>
                   </a:txBody>
@@ -7197,7 +7192,7 @@
                 </a:solidFill>
                 <a:latin typeface="Calibri"/>
               </a:rPr>
-              <a:t>Lead with Annotate then Index, the rest follows</a:t>
+              <a:t>Lead with Index then Annotate, the rest follows</a:t>
             </a:r>
           </a:p>
         </p:txBody>
@@ -7358,7 +7353,7 @@
                 </a:solidFill>
                 <a:latin typeface="Calibri"/>
               </a:rPr>
-              <a:t>Annotate</a:t>
+              <a:t>Index</a:t>
             </a:r>
           </a:p>
         </p:txBody>
@@ -7397,7 +7392,7 @@
                 </a:solidFill>
                 <a:latin typeface="Calibri"/>
               </a:rPr>
-              <a:t>Label video, 3D and images with SAM auto-segmentation and tracking. Ontology, review workflow, managed workforce if needed.</a:t>
+              <a:t>Register the data where it already lives. Embeddings and quality metrics on every frame. Find the frames worth labelling; drop the repeats.</a:t>
             </a:r>
           </a:p>
         </p:txBody>
@@ -7480,7 +7475,7 @@
                 </a:solidFill>
                 <a:latin typeface="Calibri"/>
               </a:rPr>
-              <a:t>Index</a:t>
+              <a:t>Annotate</a:t>
             </a:r>
           </a:p>
         </p:txBody>
@@ -7519,7 +7514,7 @@
                 </a:solidFill>
                 <a:latin typeface="Calibri"/>
               </a:rPr>
-              <a:t>Register the data where it already lives. Embeddings and quality metrics on every frame. Find the frames worth labelling; drop the repeats.</a:t>
+              <a:t>Label video, 3D and images with SAM auto-segmentation and tracking. Ontology, review workflow, managed workforce if needed.</a:t>
             </a:r>
           </a:p>
         </p:txBody>
@@ -8007,7 +8002,7 @@
                 </a:solidFill>
                 <a:latin typeface="Calibri"/>
               </a:rPr>
-              <a:t>Fixed cameras producing a continuous, highly repetitive stream of a narrow scene, exactly like an overhead conveyor view. The win came from curating which frames to label rather than labelling more, which is the shape of Wootzano's problem when onboarding each new packhouse.</a:t>
+              <a:t>Fixed cameras producing huge volumes of repetitive street footage, same problem as a fixed cell over a conveyor: the constraint is choosing which frames deserve labels, not annotation speed alone.</a:t>
             </a:r>
           </a:p>
         </p:txBody>
@@ -8386,7 +8381,7 @@
                 </a:solidFill>
                 <a:latin typeface="Calibri"/>
               </a:rPr>
-              <a:t>Week 1, day 1-2: register one bucket of existing line footage from two sites or two cultivars into Index, data stays in their storage, and generate embeddings plus brightness, sharpness and uniqueness metrics per frame.</a:t>
+              <a:t>Week 1, day 1-2: register one packhouse's recorded footage from their own S3/GCS bucket in Index (data never moves), generate embeddings and quality metrics, show the duplicate clusters and the blurred or badly lit tail.</a:t>
             </a:r>
           </a:p>
         </p:txBody>
@@ -8508,7 +8503,7 @@
                 </a:solidFill>
                 <a:latin typeface="Calibri"/>
               </a:rPr>
-              <a:t>Week 1, day 3-5: build the truss, stem, snip point, fruit, defect and punnet ontology in Annotate; label roughly 1,000 frames using SAM 3, object tracking and interpolation across video, with a review stage in the workflow. Metric: labelled frames per annotator hour versus their current tool.</a:t>
+              <a:t>Week 1, day 3-5: build two Collections of equal size from the same footage, one random and one de-duplicated plus diversity-sampled. Success metric: at least 40% fewer frames needed to cover the same set of distinct trusses and punnets.</a:t>
             </a:r>
           </a:p>
         </p:txBody>
@@ -8630,7 +8625,7 @@
                 </a:solidFill>
                 <a:latin typeface="Calibri"/>
               </a:rPr>
-              <a:t>Week 2, day 6-8: use similarity search and diversity sampling to create a curated Collection and a random Collection of equal size from the same footage; train their stem/snip model on each. Metric: mAP50 on a held-out site, curated versus random.</a:t>
+              <a:t>Week 2, day 1-2: set up the stem polyline, snip keypoint, fruit bitmask and defect ontology in Annotate with SAM 3 and object tracking on native video; measure minutes per truss versus their current tool.</a:t>
             </a:r>
           </a:p>
         </p:txBody>
@@ -8752,7 +8747,7 @@
                 </a:solidFill>
                 <a:latin typeface="Calibri"/>
               </a:rPr>
-              <a:t>Week 2, day 9-10: import their current production model's predictions into Active, review confusion matrix and PR curves sliced by cultivar, site and lighting, and run label validation to surface mislabelled snip points. Metric: number of label errors found and the top two failure slices named.</a:t>
+              <a:t>Week 2, day 3-4: if they can share a model, run it as an Agent pre-labelling stage and import predictions into Active. Success metric: percentage of pre-labels accepted without edit, plus a confusion matrix and per-slice F1 on stem detection.</a:t>
             </a:r>
           </a:p>
         </p:txBody>
@@ -8874,7 +8869,7 @@
                 </a:solidFill>
                 <a:latin typeface="Calibri"/>
               </a:rPr>
-              <a:t>Wrap-up: agree a target for frames to label per new site onboarding and a go/no-go threshold, for example 50% fewer frames labelled at equal or better mAP, plus an Agents stage that pre-labels new footage with their own detector.</a:t>
+              <a:t>Week 2, day 5: train or fine-tune on the curated Collection versus the random one of equal size. Success metric: higher snip-point accuracy and stem F1 on a held-out packhouse, and a ranked list of the next 500 frames to label.</a:t>
             </a:r>
           </a:p>
         </p:txBody>
@@ -9131,7 +9126,7 @@
                 </a:solidFill>
                 <a:latin typeface="Calibri"/>
               </a:rPr>
-              <a:t>•  When you install at a new packhouse or take on a new cultivar, how much footage do you collect and how many frames actually get labelled before the cell is trusted to snip?</a:t>
+              <a:t>•  When you commission a new packhouse or a new variety, how many frames do you label before the cell is ready, and who does that labelling?</a:t>
             </a:r>
           </a:p>
           <a:p>
@@ -9147,7 +9142,7 @@
                 </a:solidFill>
                 <a:latin typeface="Calibri"/>
               </a:rPr>
-              <a:t>•  Who labels today, the engineering team, an agency or the customer's staff, and in which tool?</a:t>
+              <a:t>•  How do you currently decide which recorded frames are worth annotating, and how much of what you label turns out to be near-duplicate?</a:t>
             </a:r>
           </a:p>
           <a:p>
@@ -9163,7 +9158,7 @@
                 </a:solidFill>
                 <a:latin typeface="Calibri"/>
               </a:rPr>
-              <a:t>•  How do you currently decide a model is good enough to go live on a line, and is that a number or a week of watching it run?</a:t>
+              <a:t>•  What does a snip failure look like in your logs, and how do you trace it back to the training data that caused it?</a:t>
             </a:r>
           </a:p>
           <a:p>
@@ -9179,7 +9174,7 @@
                 </a:solidFill>
                 <a:latin typeface="Calibri"/>
               </a:rPr>
-              <a:t>•  Where does the camera footage live now, your own S3 or Azure bucket, or on the cell PCs at each site, and are packhouse customers restricted on what leaves their premises?</a:t>
+              <a:t>•  Do you evaluate stem detection and weight estimation per site and per variety, or only by line throughput after rollout?</a:t>
             </a:r>
           </a:p>
           <a:p>
@@ -9195,7 +9190,7 @@
                 </a:solidFill>
                 <a:latin typeface="Calibri"/>
               </a:rPr>
-              <a:t>•  How do you pair the electronic skin force data with the vision frames, and would you want both reviewed against the same timeline?</a:t>
+              <a:t>•  Does footage stay on site in each packhouse, or does it come back to your own cloud storage, and what have customers said about data leaving their premises?</a:t>
             </a:r>
           </a:p>
         </p:txBody>

--- a/docs/briefs/wootzano.pptx
+++ b/docs/briefs/wootzano.pptx
@@ -513,27 +513,27 @@
           </a:p>
           <a:p>
             <a:r>
-              <a:t>- When you commission a new packhouse or a new variety, how many frames do you label before the cell is ready, and who does that labelling?</a:t>
-            </a:r>
-          </a:p>
-          <a:p>
-            <a:r>
-              <a:t>- How do you currently decide which recorded frames are worth annotating, and how much of what you label turns out to be near-duplicate?</a:t>
-            </a:r>
-          </a:p>
-          <a:p>
-            <a:r>
-              <a:t>- What does a snip failure look like in your logs, and how do you trace it back to the training data that caused it?</a:t>
-            </a:r>
-          </a:p>
-          <a:p>
-            <a:r>
-              <a:t>- Do you evaluate stem detection and weight estimation per site and per variety, or only by line throughput after rollout?</a:t>
-            </a:r>
-          </a:p>
-          <a:p>
-            <a:r>
-              <a:t>- Does footage stay on site in each packhouse, or does it come back to your own cloud storage, and what have customers said about data leaving their premises?</a:t>
+              <a:t>- When you commission a new packhouse or a new cultivar, how many frames do you label and how long does it take before Avarai hits the required snip accuracy?</a:t>
+            </a:r>
+          </a:p>
+          <a:p>
+            <a:r>
+              <a:t>- Where does the footage from deployed cells actually live today, and is it centralised or still on the industrial PC at each site?</a:t>
+            </a:r>
+          </a:p>
+          <a:p>
+            <a:r>
+              <a:t>- Who draws the stem polylines and snip points right now, your engineers, a contracted crew, or packhouse staff, and in what tool?</a:t>
+            </a:r>
+          </a:p>
+          <a:p>
+            <a:r>
+              <a:t>- When a site reports bad snips or bruised fruit, how do you find the matching frames and decide what to label next?</a:t>
+            </a:r>
+          </a:p>
+          <a:p>
+            <a:r>
+              <a:t>- Are the electronic skin readings time-synced with the camera frames, and do you ever want to review them alongside the video in one place?</a:t>
             </a:r>
           </a:p>
         </p:txBody>
@@ -613,22 +613,22 @@
           </a:p>
           <a:p>
             <a:r>
-              <a:t>- Small, hardware-led team with no CV or ML job ads open, so labelling may be handled informally in-house with CVAT and seen as free.</a:t>
-            </a:r>
-          </a:p>
-          <a:p>
-            <a:r>
-              <a:t>- Robotics capital spend may leave no budget line for data tooling; the buying case has to be framed as commissioning time per new site.</a:t>
-            </a:r>
-          </a:p>
-          <a:p>
-            <a:r>
-              <a:t>- Packhouse customers may forbid footage leaving their site, which limits what can be centralised (Encord's bucket-registration model helps, but needs checking early).</a:t>
-            </a:r>
-          </a:p>
-          <a:p>
-            <a:r>
-              <a:t>- Evidence base is thin: no recent signals, no job ads, and our understanding of their crops, sensors and volumes is largely inference.</a:t>
+              <a:t>- Thin evidence: no ML job ads, no recent signals and no public engineering blog, so the labelling pain is inferred from the product rather than observed. Team may be tiny and doing everything with CVAT plus scripts.</a:t>
+            </a:r>
+          </a:p>
+          <a:p>
+            <a:r>
+              <a:t>- Hardware-first culture; the differentiator they market is the electronic skin, so vision data tooling may not have budget ownership or urgency.</a:t>
+            </a:r>
+          </a:p>
+          <a:p>
+            <a:r>
+              <a:t>- Possible reliance on an Intel or integrator partner for the vision stack, which would move the buying decision outside Wootzano.</a:t>
+            </a:r>
+          </a:p>
+          <a:p>
+            <a:r>
+              <a:t>- Company size and funding stage mean a per-seat platform may be priced above what a sub-ten-person engineering team will approve without a clear per-line ROI story.</a:t>
             </a:r>
           </a:p>
         </p:txBody>
@@ -3795,7 +3795,7 @@
                 </a:solidFill>
                 <a:latin typeface="Calibri"/>
               </a:rPr>
-              <a:t>Prepared 2026-09-28</a:t>
+              <a:t>Prepared 2026-10-05</a:t>
             </a:r>
           </a:p>
           <a:p>
@@ -3905,7 +3905,7 @@
                 </a:solidFill>
                 <a:latin typeface="Calibri"/>
               </a:rPr>
-              <a:t>Wootzano's accuracy claim rests on stem detection and clean snips across endless near-identical conveyor frames, so the win is curating which frames to label and proving snip accuracy per crop, not labelling more.</a:t>
+              <a:t>Wootzano sells a per-line ROI promise (clean snip, no bruising, day two live), and every new packhouse, cultivar and season quietly forces another round of vision labelling that a small team has to absorb; that recurring cost is where Encord fits.</a:t>
             </a:r>
           </a:p>
         </p:txBody>
@@ -4201,7 +4201,7 @@
                 </a:solidFill>
                 <a:latin typeface="Calibri"/>
               </a:rPr>
-              <a:t>Wootzano sells Avarai, a collaborative robotic packing cell for post-harvest fresh produce, with a food-safe dexterous hand using patented electronic skin and a vision system that detects stems, estimates weight and snips vine produce to a retailer's target weight. Buyers are packhouses and growers, paid for on a per-line ROI case (up to 50% less human labour, 30% cost saving per line). Robots are installed on site, so models must hold up across customer sites, lighting, crops and seasons.</a:t>
+              <a:t>Avarai is a collaborative robotic packing cell for post-harvest fresh produce, sized to replace one human station on a packing line, with a dexterous hand covered in a patented food-safe electronic skin and a vision system that detects stems and snips vine produce to a target punnet weight. Buyers are packhouse operators and growers who pay against labour cost per line, with claims of 30% cost saving and 40-50% productivity increase. Economic buyer is likely the CTO or founder, since the team appears small and no ML job ads are visible.</a:t>
             </a:r>
           </a:p>
         </p:txBody>
@@ -4362,7 +4362,7 @@
                 </a:solidFill>
                 <a:latin typeface="Calibri"/>
               </a:rPr>
-              <a:t>Cameras (guess: Intel RealSense RGB-D, given the stated Intel partnership) capture close-up frames of trusses and punnets on the conveyor at each installed cell.</a:t>
+              <a:t>Cameras (likely RGB plus depth, Intel RealSense given the stated Intel partnership) capture top-down and side views of vine trusses and punnets on the conveyor; GUESS, no hardware detail published.</a:t>
             </a:r>
           </a:p>
         </p:txBody>
@@ -4484,7 +4484,7 @@
                 </a:solidFill>
                 <a:latin typeface="Calibri"/>
               </a:rPr>
-              <a:t>Guess: frames are recorded locally per site, then shipped or synced to central storage; unclear whether all sites stream back or only on-request clips during commissioning.</a:t>
+              <a:t>Frames are recorded per cell and per site, probably to local NVRs or an industrial PC, then shipped or synced to a central store for training; GUESS on whether anything is centralised today.</a:t>
             </a:r>
           </a:p>
         </p:txBody>
@@ -4606,7 +4606,7 @@
                 </a:solidFill>
                 <a:latin typeface="Calibri"/>
               </a:rPr>
-              <a:t>Engineers select clips by hand around failures (missed stem, bad snip, bruising, dropped fruit) and label stems, fruit and snip points in an open-source or in-house tool (guess: CVAT or similar).</a:t>
+              <a:t>Engineers hand pick interesting clips, mostly ones from failed snips, bruised fruit or missed stems reported by the site; GUESS, but typical for a small robotics team without curation tooling.</a:t>
             </a:r>
           </a:p>
         </p:txBody>
@@ -4728,7 +4728,7 @@
                 </a:solidFill>
                 <a:latin typeface="Calibri"/>
               </a:rPr>
-              <a:t>Detection / segmentation and weight-estimation models are retrained centrally, validated on a held-out set, then pushed to cells.</a:t>
+              <a:t>Labelling is done in-house or with a small outsourced crew using an open source tool (CVAT or similar) for stems, fruit instances and snip points; GUESS.</a:t>
             </a:r>
           </a:p>
         </p:txBody>
@@ -4850,7 +4850,7 @@
                 </a:solidFill>
                 <a:latin typeface="Calibri"/>
               </a:rPr>
-              <a:t>Guess: field performance is judged by packhouse throughput and reject rates rather than per-class mAP, so model regressions per crop variety are hard to see before rollout.</a:t>
+              <a:t>Detection and segmentation models are retrained and validated on a held out set, then deployed to the cell; weight estimation and grasp force likely combine vision output with electronic skin readings, tuned rather than learned end to end.</a:t>
             </a:r>
           </a:p>
         </p:txBody>
@@ -4972,7 +4972,7 @@
                 </a:solidFill>
                 <a:latin typeface="Calibri"/>
               </a:rPr>
-              <a:t>Tactile e-skin data is likely handled in a separate stream from vision, with no shared record of what happened in a given grasp.</a:t>
+              <a:t>Field performance is judged by line metrics (punnets per minute, reject rate, bruising complaints) rather than by model metrics tied back to specific data slices; GUESS.</a:t>
             </a:r>
           </a:p>
         </p:txBody>
@@ -5356,7 +5356,7 @@
                 </a:solidFill>
                 <a:latin typeface="Calibri"/>
               </a:rPr>
-              <a:t>Near-duplicate conveyor frames dominate. Labelling budget goes on the thousandth ordinary truss while rare failure modes (tangled vines, occluded stems, soft or damaged fruit) stay under-represented.</a:t>
+              <a:t>Every new site, cultivar or season shifts lighting, trusses and punnet types, so the vision model needs re-labelling and retraining before a cell can be commissioned at the promised day two.</a:t>
             </a:r>
           </a:p>
         </p:txBody>
@@ -5434,7 +5434,7 @@
                 </a:solidFill>
                 <a:latin typeface="Calibri"/>
               </a:rPr>
-              <a:t>A fixed-camera cell running a full packhouse shift produces highly repetitive imagery; the site sells consistency ("a clean, precise snip, each and every time").</a:t>
+              <a:t>Site promises Day 1 install, Day 2 ready to use, and adaptability across produce; that only holds if new produce data turns round in days, not weeks.</a:t>
             </a:r>
           </a:p>
         </p:txBody>
@@ -5512,7 +5512,7 @@
                 </a:solidFill>
                 <a:latin typeface="Calibri"/>
               </a:rPr>
-              <a:t>Index registers frames in their own bucket, computes embeddings and quality metrics, and lets them de-duplicate and diversity-sample into Collections. Our own warehouse-stream test cut frames to label by 61% while keeping 95% of racks, and the curated pick beat a random pick of equal size.</a:t>
+              <a:t>Annotate with SAM 3 auto-segmentation, object tracking and interpolation on native video to label a new cultivar fast, plus a managed labelling workforce for peaks. Ontology reuse means one stem and fruit schema applies across sites without rebuilding the project.</a:t>
             </a:r>
           </a:p>
         </p:txBody>
@@ -5678,7 +5678,7 @@
                 </a:solidFill>
                 <a:latin typeface="Calibri"/>
               </a:rPr>
-              <a:t>Each new site, crop variety or season is a cold start. Labelling a fresh set by hand delays go-live, which conflicts with the "Day 1 install, Day 2 ready" promise.</a:t>
+              <a:t>Conveyor footage is highly repetitive, so engineers label near identical frames and still miss the rare failures (hidden stems, overlapping trusses, damaged fruit) that cause bad snips.</a:t>
             </a:r>
           </a:p>
         </p:txBody>
@@ -5756,7 +5756,7 @@
                 </a:solidFill>
                 <a:latin typeface="Calibri"/>
               </a:rPr>
-              <a:t>Site promises next-day readiness and adaptability across produce; a deployed-robot business inevitably faces per-packhouse lighting, punnet and variety drift.</a:t>
+              <a:t>Fixed camera on a moving line plus the marketing emphasis on a clean precise snip every time implies the value sits in rare edge cases, not the average frame.</a:t>
             </a:r>
           </a:p>
         </p:txBody>
@@ -5834,7 +5834,7 @@
                 </a:solidFill>
                 <a:latin typeface="Calibri"/>
               </a:rPr>
-              <a:t>Agents run their existing detector as a pre-labelling stage in the workflow, so a new site's data arrives part-labelled and humans only correct. Annotate adds SAM 3 auto-segmentation, object tracking and interpolation on native video for fruit and truss masks.</a:t>
+              <a:t>Index registers frames from your own S3 or Azure bucket with no data movement, computes embeddings and quality metrics, and lets you de-duplicate and similarity search for the rare truss geometries. Our own test cut frames to label by 61% while keeping 95% of scenes.</a:t>
             </a:r>
           </a:p>
         </p:txBody>
@@ -6000,7 +6000,7 @@
                 </a:solidFill>
                 <a:latin typeface="Calibri"/>
               </a:rPr>
-              <a:t>No clear way to prove which data fixes a snip failure. Model changes are judged by packhouse throughput after rollout, which is slow and expensive feedback.</a:t>
+              <a:t>No clear way to tell which data to label next, so retraining is driven by whichever site complained most recently rather than by measured failure modes.</a:t>
             </a:r>
           </a:p>
         </p:txBody>
@@ -6078,7 +6078,7 @@
                 </a:solidFill>
                 <a:latin typeface="Calibri"/>
               </a:rPr>
-              <a:t>Marketing quantifies line productivity, not model metrics; no ML or CV job ads found, suggesting a small team with no dedicated data or evaluation tooling.</a:t>
+              <a:t>No ML job ads and no public ML engineering team suggests a thin team with no dedicated evaluation tooling; inferred, not stated.</a:t>
             </a:r>
           </a:p>
         </p:txBody>
@@ -6156,7 +6156,7 @@
                 </a:solidFill>
                 <a:latin typeface="Calibri"/>
               </a:rPr>
-              <a:t>Active imports their predictions for mAP/mAR/F1, PR curves and confusion matrix, sliced by class, IoU threshold and any data metric (for example blur or occlusion). Metric-to-failure correlation names which frames to label next, and label validation surfaces stem labels that are simply wrong.</a:t>
+              <a:t>Active imports your predictions and gives mAP, F1, confusion matrix and PR curves sliced by class, site or any data metric, with metric-to-failure correlation telling you which frames to label next. Also flags label errors in existing stem and fruit annotations.</a:t>
             </a:r>
           </a:p>
         </p:txBody>
@@ -6522,7 +6522,7 @@
                           </a:solidFill>
                           <a:latin typeface="Calibri"/>
                         </a:rPr>
-                        <a:t>Vine / truss stem</a:t>
+                        <a:t>Vine stem / truss backbone</a:t>
                       </a:r>
                     </a:p>
                   </a:txBody>
@@ -6566,7 +6566,7 @@
                           </a:solidFill>
                           <a:latin typeface="Calibri"/>
                         </a:rPr>
-                        <a:t>Stem geometry drives the snip; a centreline is more useful than a box</a:t>
+                        <a:t>Snip location depends on stem path, not a box; polyline captures branching geometry</a:t>
                       </a:r>
                     </a:p>
                   </a:txBody>
@@ -6634,7 +6634,7 @@
                           </a:solidFill>
                           <a:latin typeface="Calibri"/>
                         </a:rPr>
-                        <a:t>The exact cut location the controller needs, evaluated as pixel error</a:t>
+                        <a:t>The single actionable output of the vision system, needs pixel level supervision</a:t>
                       </a:r>
                     </a:p>
                   </a:txBody>
@@ -6658,7 +6658,7 @@
                           </a:solidFill>
                           <a:latin typeface="Calibri"/>
                         </a:rPr>
-                        <a:t>Individual fruit</a:t>
+                        <a:t>Individual fruit instance</a:t>
                       </a:r>
                     </a:p>
                   </a:txBody>
@@ -6702,7 +6702,7 @@
                           </a:solidFill>
                           <a:latin typeface="Calibri"/>
                         </a:rPr>
-                        <a:t>Per-fruit area feeds weight estimation to the retailer's target</a:t>
+                        <a:t>Overlapping tomatoes on a truss need instance masks for weight estimation</a:t>
                       </a:r>
                     </a:p>
                   </a:txBody>
@@ -6726,7 +6726,7 @@
                           </a:solidFill>
                           <a:latin typeface="Calibri"/>
                         </a:rPr>
-                        <a:t>Grasp point on fruit</a:t>
+                        <a:t>Calyx / stem-fruit junction</a:t>
                       </a:r>
                     </a:p>
                   </a:txBody>
@@ -6770,7 +6770,7 @@
                           </a:solidFill>
                           <a:latin typeface="Calibri"/>
                         </a:rPr>
-                        <a:t>Links vision to the e-skin force decision for the dexterous hand</a:t>
+                        <a:t>Anchors grasp planning and separates fruit from stem for clean cuts</a:t>
                       </a:r>
                     </a:p>
                   </a:txBody>
@@ -6838,7 +6838,7 @@
                           </a:solidFill>
                           <a:latin typeface="Calibri"/>
                         </a:rPr>
-                        <a:t>Placement and fill checks against retailer packing spec</a:t>
+                        <a:t>Target container detection for placement and fill-level checks</a:t>
                       </a:r>
                     </a:p>
                   </a:txBody>
@@ -6862,7 +6862,7 @@
                           </a:solidFill>
                           <a:latin typeface="Calibri"/>
                         </a:rPr>
-                        <a:t>Defect or damage (bruise, split, mould)</a:t>
+                        <a:t>Surface defect or bruise</a:t>
                       </a:r>
                     </a:p>
                   </a:txBody>
@@ -6906,7 +6906,7 @@
                           </a:solidFill>
                           <a:latin typeface="Calibri"/>
                         </a:rPr>
-                        <a:t>Reject decisions and evidence that handling caused no bruising</a:t>
+                        <a:t>Grade and reject decisions; polygon handles irregular blemish shapes</a:t>
                       </a:r>
                     </a:p>
                   </a:txBody>
@@ -6930,7 +6930,7 @@
                           </a:solidFill>
                           <a:latin typeface="Calibri"/>
                         </a:rPr>
-                        <a:t>Occlusion / tangled truss</a:t>
+                        <a:t>Grasp region on produce</a:t>
                       </a:r>
                     </a:p>
                   </a:txBody>
@@ -6952,7 +6952,7 @@
                           </a:solidFill>
                           <a:latin typeface="Calibri"/>
                         </a:rPr>
-                        <a:t>frame classification</a:t>
+                        <a:t>polygon</a:t>
                       </a:r>
                     </a:p>
                   </a:txBody>
@@ -6974,7 +6974,7 @@
                           </a:solidFill>
                           <a:latin typeface="Calibri"/>
                         </a:rPr>
-                        <a:t>Flags the hard frames worth over-sampling in training</a:t>
+                        <a:t>Links vision to the electronic skin force policy and bruise avoidance</a:t>
                       </a:r>
                     </a:p>
                   </a:txBody>
@@ -6998,7 +6998,7 @@
                           </a:solidFill>
                           <a:latin typeface="Calibri"/>
                         </a:rPr>
-                        <a:t>Crop variety and site conditions</a:t>
+                        <a:t>Frame condition (cultivar, site, lighting, occlusion level)</a:t>
                       </a:r>
                     </a:p>
                   </a:txBody>
@@ -7042,7 +7042,7 @@
                           </a:solidFill>
                           <a:latin typeface="Calibri"/>
                         </a:rPr>
-                        <a:t>Lets them slice model performance per packhouse, variety and shift</a:t>
+                        <a:t>Lets you slice model performance by site and season in Active</a:t>
                       </a:r>
                     </a:p>
                   </a:txBody>
@@ -7192,7 +7192,7 @@
                 </a:solidFill>
                 <a:latin typeface="Calibri"/>
               </a:rPr>
-              <a:t>Lead with Index then Annotate, the rest follows</a:t>
+              <a:t>Lead with Annotate then Index, the rest follows</a:t>
             </a:r>
           </a:p>
         </p:txBody>
@@ -7353,7 +7353,7 @@
                 </a:solidFill>
                 <a:latin typeface="Calibri"/>
               </a:rPr>
-              <a:t>Index</a:t>
+              <a:t>Annotate</a:t>
             </a:r>
           </a:p>
         </p:txBody>
@@ -7392,7 +7392,7 @@
                 </a:solidFill>
                 <a:latin typeface="Calibri"/>
               </a:rPr>
-              <a:t>Register the data where it already lives. Embeddings and quality metrics on every frame. Find the frames worth labelling; drop the repeats.</a:t>
+              <a:t>Label video, 3D and images with SAM auto-segmentation and tracking. Ontology, review workflow, managed workforce if needed.</a:t>
             </a:r>
           </a:p>
         </p:txBody>
@@ -7475,7 +7475,7 @@
                 </a:solidFill>
                 <a:latin typeface="Calibri"/>
               </a:rPr>
-              <a:t>Annotate</a:t>
+              <a:t>Index</a:t>
             </a:r>
           </a:p>
         </p:txBody>
@@ -7514,7 +7514,7 @@
                 </a:solidFill>
                 <a:latin typeface="Calibri"/>
               </a:rPr>
-              <a:t>Label video, 3D and images with SAM auto-segmentation and tracking. Ontology, review workflow, managed workforce if needed.</a:t>
+              <a:t>Register the data where it already lives. Embeddings and quality metrics on every frame. Find the frames worth labelling; drop the repeats.</a:t>
             </a:r>
           </a:p>
         </p:txBody>
@@ -8002,7 +8002,7 @@
                 </a:solidFill>
                 <a:latin typeface="Calibri"/>
               </a:rPr>
-              <a:t>Fixed cameras producing huge volumes of repetitive street footage, same problem as a fixed cell over a conveyor: the constraint is choosing which frames deserve labels, not annotation speed alone.</a:t>
+              <a:t>Fixed cameras watching a repetitive scene with huge frame volume and rare events that matter, exactly like a packing line conveyor. They cut dataset size through curation rather than labelling more.</a:t>
             </a:r>
           </a:p>
         </p:txBody>
@@ -8381,7 +8381,7 @@
                 </a:solidFill>
                 <a:latin typeface="Calibri"/>
               </a:rPr>
-              <a:t>Week 1, day 1-2: register one packhouse's recorded footage from their own S3/GCS bucket in Index (data never moves), generate embeddings and quality metrics, show the duplicate clusters and the blurred or badly lit tail.</a:t>
+              <a:t>Week 1, day 1-2: register one site's recorded footage from your existing bucket into Index (data stays in your storage), generate embeddings and quality metrics, and report how many frames are near duplicates versus genuinely distinct trusses.</a:t>
             </a:r>
           </a:p>
         </p:txBody>
@@ -8503,7 +8503,7 @@
                 </a:solidFill>
                 <a:latin typeface="Calibri"/>
               </a:rPr>
-              <a:t>Week 1, day 3-5: build two Collections of equal size from the same footage, one random and one de-duplicated plus diversity-sampled. Success metric: at least 40% fewer frames needed to cover the same set of distinct trusses and punnets.</a:t>
+              <a:t>Week 1, day 3-5: build the stem, fruit, calyx, snip point and defect ontology in Annotate, label 300-500 curated frames using SAM 3 and video tracking, and measure minutes per frame against your current tool.</a:t>
             </a:r>
           </a:p>
         </p:txBody>
@@ -8625,7 +8625,7 @@
                 </a:solidFill>
                 <a:latin typeface="Calibri"/>
               </a:rPr>
-              <a:t>Week 2, day 1-2: set up the stem polyline, snip keypoint, fruit bitmask and defect ontology in Annotate with SAM 3 and object tracking on native video; measure minutes per truss versus their current tool.</a:t>
+              <a:t>Week 2, day 1-2: run your current detector as an Agents pre-labelling stage so annotators correct rather than draw; target 50% or better reduction in hand drawn objects.</a:t>
             </a:r>
           </a:p>
         </p:txBody>
@@ -8747,7 +8747,7 @@
                 </a:solidFill>
                 <a:latin typeface="Calibri"/>
               </a:rPr>
-              <a:t>Week 2, day 3-4: if they can share a model, run it as an Agent pre-labelling stage and import predictions into Active. Success metric: percentage of pre-labels accepted without edit, plus a confusion matrix and per-slice F1 on stem detection.</a:t>
+              <a:t>Week 2, day 3-4: import your model predictions into Active, produce mAP and F1 sliced by cultivar, occlusion and lighting, and rank which failure slice to label next.</a:t>
             </a:r>
           </a:p>
         </p:txBody>
@@ -8869,7 +8869,7 @@
                 </a:solidFill>
                 <a:latin typeface="Calibri"/>
               </a:rPr>
-              <a:t>Week 2, day 5: train or fine-tune on the curated Collection versus the random one of equal size. Success metric: higher snip-point accuracy and stem F1 on a held-out packhouse, and a ranked list of the next 500 frames to label.</a:t>
+              <a:t>Week 2, day 5: train on the curated pick versus a random pick of equal size and compare snip point error and stem detection mAP. Success = equal or better accuracy from 40-60% fewer labelled frames, plus a documented minutes-per-frame reduction.</a:t>
             </a:r>
           </a:p>
         </p:txBody>
@@ -9126,7 +9126,7 @@
                 </a:solidFill>
                 <a:latin typeface="Calibri"/>
               </a:rPr>
-              <a:t>•  When you commission a new packhouse or a new variety, how many frames do you label before the cell is ready, and who does that labelling?</a:t>
+              <a:t>•  When you commission a new packhouse or a new cultivar, how many frames do you label and how long does it take before Avarai hits the required snip accuracy?</a:t>
             </a:r>
           </a:p>
           <a:p>
@@ -9142,7 +9142,7 @@
                 </a:solidFill>
                 <a:latin typeface="Calibri"/>
               </a:rPr>
-              <a:t>•  How do you currently decide which recorded frames are worth annotating, and how much of what you label turns out to be near-duplicate?</a:t>
+              <a:t>•  Where does the footage from deployed cells actually live today, and is it centralised or still on the industrial PC at each site?</a:t>
             </a:r>
           </a:p>
           <a:p>
@@ -9158,7 +9158,7 @@
                 </a:solidFill>
                 <a:latin typeface="Calibri"/>
               </a:rPr>
-              <a:t>•  What does a snip failure look like in your logs, and how do you trace it back to the training data that caused it?</a:t>
+              <a:t>•  Who draws the stem polylines and snip points right now, your engineers, a contracted crew, or packhouse staff, and in what tool?</a:t>
             </a:r>
           </a:p>
           <a:p>
@@ -9174,7 +9174,7 @@
                 </a:solidFill>
                 <a:latin typeface="Calibri"/>
               </a:rPr>
-              <a:t>•  Do you evaluate stem detection and weight estimation per site and per variety, or only by line throughput after rollout?</a:t>
+              <a:t>•  When a site reports bad snips or bruised fruit, how do you find the matching frames and decide what to label next?</a:t>
             </a:r>
           </a:p>
           <a:p>
@@ -9190,7 +9190,7 @@
                 </a:solidFill>
                 <a:latin typeface="Calibri"/>
               </a:rPr>
-              <a:t>•  Does footage stay on site in each packhouse, or does it come back to your own cloud storage, and what have customers said about data leaving their premises?</a:t>
+              <a:t>•  Are the electronic skin readings time-synced with the camera frames, and do you ever want to review them alongside the video in one place?</a:t>
             </a:r>
           </a:p>
         </p:txBody>
